--- a/Topic_B/Exam_Practice/TB-L05_Writing_Workshop_Furniture_Furnishings_and_Appliances.pptx
+++ b/Topic_B/Exam_Practice/TB-L05_Writing_Workshop_Furniture_Furnishings_and_Appliances.pptx
@@ -784,7 +784,11 @@
           <a:lstStyle/>
           <a:p>
             <a:r>
-              <a:rPr lang="en-US" dirty="0"/>
+              <a:rPr lang="ar-SA" dirty="0">
+                <a:latin typeface="Amiri" pitchFamily="2" charset="-78"/>
+                <a:ea typeface="Amiri" pitchFamily="2" charset="-78"/>
+                <a:cs typeface="Amiri" pitchFamily="2" charset="-78"/>
+              </a:rPr>
               <a:t>Q3 (3 min to choose and read). Title (أ) suits Core and Develop; title (ب) suits Stretch.</a:t>
             </a:r>
             <a:endParaRPr lang="en-US" dirty="0"/>
@@ -1403,7 +1407,11 @@
           <a:lstStyle/>
           <a:p>
             <a:r>
-              <a:rPr lang="en-US" dirty="0"/>
+              <a:rPr lang="ar-SA" dirty="0">
+                <a:latin typeface="Amiri" pitchFamily="2" charset="-78"/>
+                <a:ea typeface="Amiri" pitchFamily="2" charset="-78"/>
+                <a:cs typeface="Amiri" pitchFamily="2" charset="-78"/>
+              </a:rPr>
               <a:t>WELCOME (1 min) — while students join.
 • Greet each student by name as they arrive: السَّلَامُ عَلَيْكُمْ. Take the register (Pastoral Tracker: attendance 0/1).
 • 2-MINUTE CHECK-IN (SEND training): a private chat to any student who seemed unsettled last lesson — “Are you okay today? 👍 / 👎”.
@@ -1936,7 +1944,11 @@
           <a:lstStyle/>
           <a:p>
             <a:r>
-              <a:rPr lang="en-US" dirty="0"/>
+              <a:rPr lang="ar-SA" dirty="0">
+                <a:latin typeface="Amiri" pitchFamily="2" charset="-78"/>
+                <a:ea typeface="Amiri" pitchFamily="2" charset="-78"/>
+                <a:cs typeface="Amiri" pitchFamily="2" charset="-78"/>
+              </a:rPr>
               <a:t>Question words: مَاذَا (what) · أَيْنَ (where) · مَا المُشْكِلَةُ (what problem) · ادْعِي (invite — to a girl) — bullets 1–2 are PAST, bullet 4 is FUTURE.</a:t>
             </a:r>
             <a:endParaRPr lang="en-US" dirty="0"/>
@@ -2508,6 +2520,7 @@
                   <a:srgbClr val="D4AF37"/>
                 </a:solidFill>
                 <a:latin typeface="Amiri" pitchFamily="2" charset="-78"/>
+                <a:ea typeface="Amiri" pitchFamily="2" charset="-78"/>
                 <a:cs typeface="Amiri" pitchFamily="2" charset="-78"/>
               </a:rPr>
               <a:t>م</a:t>
@@ -2714,6 +2727,7 @@
                   <a:srgbClr val="D4AF37"/>
                 </a:solidFill>
                 <a:latin typeface="Amiri" pitchFamily="2" charset="-78"/>
+                <a:ea typeface="Amiri" pitchFamily="2" charset="-78"/>
                 <a:cs typeface="Amiri" pitchFamily="2" charset="-78"/>
               </a:rPr>
               <a:t>وَرْشَةُ الكِتَابَةِ — الأَثَاثُ وَالأَجْهِزَةُ</a:t>
@@ -3171,6 +3185,7 @@
                   <a:srgbClr val="D4AF37"/>
                 </a:solidFill>
                 <a:latin typeface="Amiri" pitchFamily="2" charset="-78"/>
+                <a:ea typeface="Amiri" pitchFamily="2" charset="-78"/>
                 <a:cs typeface="Amiri" pitchFamily="2" charset="-78"/>
               </a:rPr>
               <a:t>م</a:t>
@@ -3491,6 +3506,7 @@
                   <a:srgbClr val="8A6D1E"/>
                 </a:solidFill>
                 <a:latin typeface="Amiri" pitchFamily="2" charset="-78"/>
+                <a:ea typeface="Amiri" pitchFamily="2" charset="-78"/>
                 <a:cs typeface="Amiri" pitchFamily="2" charset="-78"/>
               </a:rPr>
               <a:t>نَمُوذَجُ الإِجَابَةِ</a:t>
@@ -3604,6 +3620,7 @@
                   <a:srgbClr val="1F2A37"/>
                 </a:solidFill>
                 <a:latin typeface="Amiri" pitchFamily="2" charset="-78"/>
+                <a:ea typeface="Amiri" pitchFamily="2" charset="-78"/>
                 <a:cs typeface="Amiri" pitchFamily="2" charset="-78"/>
               </a:rPr>
               <a:t>مَرْحَبًا يَا هَالَةُ،</a:t>
@@ -3623,6 +3640,7 @@
                   <a:srgbClr val="1F2A37"/>
                 </a:solidFill>
                 <a:latin typeface="Amiri" pitchFamily="2" charset="-78"/>
+                <a:ea typeface="Amiri" pitchFamily="2" charset="-78"/>
                 <a:cs typeface="Amiri" pitchFamily="2" charset="-78"/>
               </a:rPr>
               <a:t>كَيْفَ حَالُكِ؟ غَيَّرْتُ أَثَاثَ غُرْفَتِي فِي نِهَايَةِ الأُسْبُوعِ. اشْتَرَيْتُ سَرِيرًا جَدِيدًا وَمَكْتَبًا أَبْيَضَ، وَوَضَعْتُ المَكْتَبَ بِجَانِبِ النَّافِذَةِ. فَوْقَ المَكْتَبِ يُوجَدُ رَفٌّ لِلْكُتُبِ. السَّتَائِرُ الجَدِيدَةُ زَرْقَاءُ، وَأَنَا أُحِبُّهَا كَثِيرًا، لِأَنَّهَا جَمِيلَةٌ. لٰكِنَّ عِنْدَنَا مُشْكِلَةً: الغَسَّالَةُ مُعَطَّلَةٌ مُنْذُ يَوْمَيْنِ، فَغَسَلْنَا المَلَابِسَ بِأَيْدِينَا! غَدًا سَيَأْتِي الفَنِّيُّ لِيُصْلِحَهَا. فِي العُطْلَةِ تَعَالَيْ وَشَاهِدِي غُرْفَتِي!</a:t>
@@ -3642,6 +3660,7 @@
                   <a:srgbClr val="1F2A37"/>
                 </a:solidFill>
                 <a:latin typeface="Amiri" pitchFamily="2" charset="-78"/>
+                <a:ea typeface="Amiri" pitchFamily="2" charset="-78"/>
                 <a:cs typeface="Amiri" pitchFamily="2" charset="-78"/>
               </a:rPr>
               <a:t>مَعَ السَّلَامَةِ،</a:t>
@@ -3661,6 +3680,7 @@
                   <a:srgbClr val="1F2A37"/>
                 </a:solidFill>
                 <a:latin typeface="Amiri" pitchFamily="2" charset="-78"/>
+                <a:ea typeface="Amiri" pitchFamily="2" charset="-78"/>
                 <a:cs typeface="Amiri" pitchFamily="2" charset="-78"/>
               </a:rPr>
               <a:t>رِيمُ</a:t>
@@ -3824,11 +3844,12 @@
               <a:buNone/>
             </a:pPr>
             <a:r>
-              <a:rPr lang="en-US" sz="950" b="1" dirty="0">
+              <a:rPr lang="ar-SA" sz="950" b="1" dirty="0">
                 <a:solidFill>
                   <a:srgbClr val="FFFFFF"/>
                 </a:solidFill>
                 <a:latin typeface="Calibri" pitchFamily="34" charset="0"/>
+                <a:ea typeface="Amiri" pitchFamily="2" charset="-78"/>
                 <a:cs typeface="Amiri" pitchFamily="2" charset="-78"/>
               </a:rPr>
               <a:t>وَضَعْتُ المَكْتَبَ بِجَانِبِ</a:t>
@@ -3889,11 +3910,12 @@
               <a:buNone/>
             </a:pPr>
             <a:r>
-              <a:rPr lang="en-US" sz="950" b="1" dirty="0">
+              <a:rPr lang="ar-SA" sz="950" b="1" dirty="0">
                 <a:solidFill>
                   <a:srgbClr val="FFFFFF"/>
                 </a:solidFill>
                 <a:latin typeface="Calibri" pitchFamily="34" charset="0"/>
+                <a:ea typeface="Amiri" pitchFamily="2" charset="-78"/>
                 <a:cs typeface="Amiri" pitchFamily="2" charset="-78"/>
               </a:rPr>
               <a:t>أُحِبُّهَا</a:t>
@@ -3954,11 +3976,12 @@
               <a:buNone/>
             </a:pPr>
             <a:r>
-              <a:rPr lang="en-US" sz="950" b="1" dirty="0">
+              <a:rPr lang="ar-SA" sz="950" b="1" dirty="0">
                 <a:solidFill>
                   <a:srgbClr val="FFFFFF"/>
                 </a:solidFill>
                 <a:latin typeface="Calibri" pitchFamily="34" charset="0"/>
+                <a:ea typeface="Amiri" pitchFamily="2" charset="-78"/>
                 <a:cs typeface="Amiri" pitchFamily="2" charset="-78"/>
               </a:rPr>
               <a:t>مُعَطَّلَةٌ مُنْذُ</a:t>
@@ -4019,11 +4042,12 @@
               <a:buNone/>
             </a:pPr>
             <a:r>
-              <a:rPr lang="en-US" sz="950" b="1" dirty="0">
+              <a:rPr lang="ar-SA" sz="950" b="1" dirty="0">
                 <a:solidFill>
                   <a:srgbClr val="FFFFFF"/>
                 </a:solidFill>
                 <a:latin typeface="Calibri" pitchFamily="34" charset="0"/>
+                <a:ea typeface="Amiri" pitchFamily="2" charset="-78"/>
                 <a:cs typeface="Amiri" pitchFamily="2" charset="-78"/>
               </a:rPr>
               <a:t>لِيُصْلِحَهَا</a:t>
@@ -4157,6 +4181,7 @@
                   <a:srgbClr val="D4AF37"/>
                 </a:solidFill>
                 <a:latin typeface="Amiri" pitchFamily="2" charset="-78"/>
+                <a:ea typeface="Amiri" pitchFamily="2" charset="-78"/>
                 <a:cs typeface="Amiri" pitchFamily="2" charset="-78"/>
               </a:rPr>
               <a:t>م</a:t>
@@ -4477,6 +4502,7 @@
                   <a:srgbClr val="8A6D1E"/>
                 </a:solidFill>
                 <a:latin typeface="Amiri" pitchFamily="2" charset="-78"/>
+                <a:ea typeface="Amiri" pitchFamily="2" charset="-78"/>
                 <a:cs typeface="Amiri" pitchFamily="2" charset="-78"/>
               </a:rPr>
               <a:t>نَمُوذَجُ الإِجَابَةِ</a:t>
@@ -4590,6 +4616,7 @@
                   <a:srgbClr val="1F2A37"/>
                 </a:solidFill>
                 <a:latin typeface="Amiri" pitchFamily="2" charset="-78"/>
+                <a:ea typeface="Amiri" pitchFamily="2" charset="-78"/>
                 <a:cs typeface="Amiri" pitchFamily="2" charset="-78"/>
               </a:rPr>
               <a:t>عَزِيزَتِي هَالَةُ،</a:t>
@@ -4609,6 +4636,7 @@
                   <a:srgbClr val="1F2A37"/>
                 </a:solidFill>
                 <a:latin typeface="Amiri" pitchFamily="2" charset="-78"/>
+                <a:ea typeface="Amiri" pitchFamily="2" charset="-78"/>
                 <a:cs typeface="Amiri" pitchFamily="2" charset="-78"/>
               </a:rPr>
               <a:t>تَحِيَّةً طَيِّبَةً، وَبَعْدُ، فَقَدْ قَضَيْتُ نِهَايَةَ الأُسْبُوعِ أُغَيِّرُ أَثَاثَ غُرْفَتِي، الَّتِي لَمْ تَتَغَيَّرْ مُنْذُ كُنْتُ فِي العَاشِرَةِ. اشْتَرَيْتُ سَرِيرًا أَكْبَرَ، وَصَبَغْتُ مَكْتَبِيَ القَدِيمَ بِاللَّوْنِ الأَبْيَضِ بَدَلًا مِنْ أَنْ أَشْتَرِيَ مَكْتَبًا جَدِيدًا، ثُمَّ وَضَعْتُهُ بِجَانِبِ النَّافِذَةِ لِأَدْرُسَ فِي ضَوْءِ الشَّمْسِ. أَمَّا الخِزَانَةُ القَدِيمَةُ فَأَعْطَيْنَاهَا لِبِنْتِ خَالَتِي. لٰكِنَّ فَرْحَتِي لَمْ تَكْتَمِلْ؛ فَالغَسَّالَةُ الَّتِي اشْتَرَيْنَاهَا قَبْلَ سَنَةٍ تَعَطَّلَتْ، وَأَغْرَقَتْ أَرْضَ المَطْبَخِ بِالمَاءِ! سَيَأْتِي الفَنِّيُّ غَدًا، وَإِذَا لَمْ يَسْتَطِعْ أَنْ يُصْلِحَهَا، فَسَنَشْتَرِي وَاحِدَةً جَدِيدَةً. تَعَالَيْ فِي العُطْلَةِ لِتَرَيْ غُرْفَتِي!</a:t>
@@ -4628,6 +4656,7 @@
                   <a:srgbClr val="1F2A37"/>
                 </a:solidFill>
                 <a:latin typeface="Amiri" pitchFamily="2" charset="-78"/>
+                <a:ea typeface="Amiri" pitchFamily="2" charset="-78"/>
                 <a:cs typeface="Amiri" pitchFamily="2" charset="-78"/>
               </a:rPr>
               <a:t>مَعَ مَحَبَّتِي،</a:t>
@@ -4647,6 +4676,7 @@
                   <a:srgbClr val="1F2A37"/>
                 </a:solidFill>
                 <a:latin typeface="Amiri" pitchFamily="2" charset="-78"/>
+                <a:ea typeface="Amiri" pitchFamily="2" charset="-78"/>
                 <a:cs typeface="Amiri" pitchFamily="2" charset="-78"/>
               </a:rPr>
               <a:t>رِيمُ</a:t>
@@ -4810,11 +4840,12 @@
               <a:buNone/>
             </a:pPr>
             <a:r>
-              <a:rPr lang="en-US" sz="950" b="1" dirty="0">
+              <a:rPr lang="ar-SA" sz="950" b="1" dirty="0">
                 <a:solidFill>
                   <a:srgbClr val="FFFFFF"/>
                 </a:solidFill>
                 <a:latin typeface="Calibri" pitchFamily="34" charset="0"/>
+                <a:ea typeface="Amiri" pitchFamily="2" charset="-78"/>
                 <a:cs typeface="Amiri" pitchFamily="2" charset="-78"/>
               </a:rPr>
               <a:t>الَّتِي لَمْ تَتَغَيَّرْ</a:t>
@@ -4875,11 +4906,12 @@
               <a:buNone/>
             </a:pPr>
             <a:r>
-              <a:rPr lang="en-US" sz="950" b="1" dirty="0">
+              <a:rPr lang="ar-SA" sz="950" b="1" dirty="0">
                 <a:solidFill>
                   <a:srgbClr val="FFFFFF"/>
                 </a:solidFill>
                 <a:latin typeface="Calibri" pitchFamily="34" charset="0"/>
+                <a:ea typeface="Amiri" pitchFamily="2" charset="-78"/>
                 <a:cs typeface="Amiri" pitchFamily="2" charset="-78"/>
               </a:rPr>
               <a:t>بَدَلًا مِنْ أَنْ أَشْتَرِيَ</a:t>
@@ -4940,11 +4972,12 @@
               <a:buNone/>
             </a:pPr>
             <a:r>
-              <a:rPr lang="en-US" sz="950" b="1" dirty="0">
+              <a:rPr lang="ar-SA" sz="950" b="1" dirty="0">
                 <a:solidFill>
                   <a:srgbClr val="FFFFFF"/>
                 </a:solidFill>
                 <a:latin typeface="Calibri" pitchFamily="34" charset="0"/>
+                <a:ea typeface="Amiri" pitchFamily="2" charset="-78"/>
                 <a:cs typeface="Amiri" pitchFamily="2" charset="-78"/>
               </a:rPr>
               <a:t>أَمَّا الخِزَانَةُ … فَأَعْطَيْنَاهَا</a:t>
@@ -5005,11 +5038,12 @@
               <a:buNone/>
             </a:pPr>
             <a:r>
-              <a:rPr lang="en-US" sz="950" b="1" dirty="0">
+              <a:rPr lang="ar-SA" sz="950" b="1" dirty="0">
                 <a:solidFill>
                   <a:srgbClr val="FFFFFF"/>
                 </a:solidFill>
                 <a:latin typeface="Calibri" pitchFamily="34" charset="0"/>
+                <a:ea typeface="Amiri" pitchFamily="2" charset="-78"/>
                 <a:cs typeface="Amiri" pitchFamily="2" charset="-78"/>
               </a:rPr>
               <a:t>إِذَا لَمْ يَسْتَطِعْ … فَسَنَشْتَرِي</a:t>
@@ -5143,6 +5177,7 @@
                   <a:srgbClr val="D4AF37"/>
                 </a:solidFill>
                 <a:latin typeface="Amiri" pitchFamily="2" charset="-78"/>
+                <a:ea typeface="Amiri" pitchFamily="2" charset="-78"/>
                 <a:cs typeface="Amiri" pitchFamily="2" charset="-78"/>
               </a:rPr>
               <a:t>م</a:t>
@@ -5463,6 +5498,7 @@
                   <a:srgbClr val="8A6D1E"/>
                 </a:solidFill>
                 <a:latin typeface="Amiri" pitchFamily="2" charset="-78"/>
+                <a:ea typeface="Amiri" pitchFamily="2" charset="-78"/>
                 <a:cs typeface="Amiri" pitchFamily="2" charset="-78"/>
               </a:rPr>
               <a:t>اخْتَرْ عُنْوَانًا وَاحِدًا</a:t>
@@ -5743,6 +5779,7 @@
                   <a:srgbClr val="1B3B6F"/>
                 </a:solidFill>
                 <a:latin typeface="Amiri" pitchFamily="2" charset="-78"/>
+                <a:ea typeface="Amiri" pitchFamily="2" charset="-78"/>
                 <a:cs typeface="Amiri" pitchFamily="2" charset="-78"/>
               </a:rPr>
               <a:t>غُرْفَتِي</a:t>
@@ -5781,6 +5818,7 @@
                   <a:srgbClr val="1B3B6F"/>
                 </a:solidFill>
                 <a:latin typeface="Amiri" pitchFamily="2" charset="-78"/>
+                <a:ea typeface="Amiri" pitchFamily="2" charset="-78"/>
                 <a:cs typeface="Amiri" pitchFamily="2" charset="-78"/>
               </a:rPr>
               <a:t>(أ)</a:t>
@@ -5887,6 +5925,7 @@
                   <a:srgbClr val="1B3B6F"/>
                 </a:solidFill>
                 <a:latin typeface="Amiri" pitchFamily="2" charset="-78"/>
+                <a:ea typeface="Amiri" pitchFamily="2" charset="-78"/>
                 <a:cs typeface="Amiri" pitchFamily="2" charset="-78"/>
               </a:rPr>
               <a:t>صِفْ غُرْفَتَكَ وَأَثَاثَهَا · أَيْنَ الأَشْيَاءُ؟ وَلِمَاذَا تَسْتَعْمِلُهَا؟ · تَغْيِيرٌ قُمْتَ بِهِ فِي غُرْفَتِكَ · رَأْيُكَ وَخُطَطُكَ</a:t>
@@ -6018,6 +6057,7 @@
                   <a:srgbClr val="1B3B6F"/>
                 </a:solidFill>
                 <a:latin typeface="Amiri" pitchFamily="2" charset="-78"/>
+                <a:ea typeface="Amiri" pitchFamily="2" charset="-78"/>
                 <a:cs typeface="Amiri" pitchFamily="2" charset="-78"/>
               </a:rPr>
               <a:t>الأَجْهِزَةُ الحَدِيثَةُ: رَاحَةٌ أَمْ اعْتِمَادٌ؟</a:t>
@@ -6056,6 +6096,7 @@
                   <a:srgbClr val="1B3B6F"/>
                 </a:solidFill>
                 <a:latin typeface="Amiri" pitchFamily="2" charset="-78"/>
+                <a:ea typeface="Amiri" pitchFamily="2" charset="-78"/>
                 <a:cs typeface="Amiri" pitchFamily="2" charset="-78"/>
               </a:rPr>
               <a:t>(ب)</a:t>
@@ -6162,6 +6203,7 @@
                   <a:srgbClr val="1B3B6F"/>
                 </a:solidFill>
                 <a:latin typeface="Amiri" pitchFamily="2" charset="-78"/>
+                <a:ea typeface="Amiri" pitchFamily="2" charset="-78"/>
                 <a:cs typeface="Amiri" pitchFamily="2" charset="-78"/>
               </a:rPr>
               <a:t>الأَجْهِزَةُ فِي بُيُوتِنَا اليَوْمَ · المَاضِي وَالحَاضِرُ · تَجْرِبَةٌ شَخْصِيَّةٌ · رَأْيُكَ وَاقْتِرَاحُكَ</a:t>
@@ -6361,6 +6403,7 @@
                   <a:srgbClr val="D4AF37"/>
                 </a:solidFill>
                 <a:latin typeface="Amiri" pitchFamily="2" charset="-78"/>
+                <a:ea typeface="Amiri" pitchFamily="2" charset="-78"/>
                 <a:cs typeface="Amiri" pitchFamily="2" charset="-78"/>
               </a:rPr>
               <a:t>م</a:t>
@@ -6681,6 +6724,7 @@
                   <a:srgbClr val="8A6D1E"/>
                 </a:solidFill>
                 <a:latin typeface="Amiri" pitchFamily="2" charset="-78"/>
+                <a:ea typeface="Amiri" pitchFamily="2" charset="-78"/>
                 <a:cs typeface="Amiri" pitchFamily="2" charset="-78"/>
               </a:rPr>
               <a:t>خُطَّةُ الكِتَابَةِ</a:t>
@@ -7305,6 +7349,7 @@
                   <a:srgbClr val="1B3B6F"/>
                 </a:solidFill>
                 <a:latin typeface="Amiri" pitchFamily="2" charset="-78"/>
+                <a:ea typeface="Amiri" pitchFamily="2" charset="-78"/>
                 <a:cs typeface="Amiri" pitchFamily="2" charset="-78"/>
               </a:rPr>
               <a:t>فَوْقَ المَكْتَبِ رَفَّانِ لِلْكُتُبِ.</a:t>
@@ -7404,6 +7449,7 @@
                   <a:srgbClr val="1B3B6F"/>
                 </a:solidFill>
                 <a:latin typeface="Amiri" pitchFamily="2" charset="-78"/>
+                <a:ea typeface="Amiri" pitchFamily="2" charset="-78"/>
                 <a:cs typeface="Amiri" pitchFamily="2" charset="-78"/>
               </a:rPr>
               <a:t>صَبَغْنَا الجُدْرَانَ، وَاشْتَرَيْنَا مِصْبَاحًا.</a:t>
@@ -7503,6 +7549,7 @@
                   <a:srgbClr val="1B3B6F"/>
                 </a:solidFill>
                 <a:latin typeface="Amiri" pitchFamily="2" charset="-78"/>
+                <a:ea typeface="Amiri" pitchFamily="2" charset="-78"/>
                 <a:cs typeface="Amiri" pitchFamily="2" charset="-78"/>
               </a:rPr>
               <a:t>سَأَضَعُهُ فِي الزَّاوِيَةِ.</a:t>
@@ -7664,6 +7711,7 @@
                   <a:srgbClr val="1F2A37"/>
                 </a:solidFill>
                 <a:latin typeface="Amiri" pitchFamily="2" charset="-78"/>
+                <a:ea typeface="Amiri" pitchFamily="2" charset="-78"/>
                 <a:cs typeface="Amiri" pitchFamily="2" charset="-78"/>
               </a:rPr>
               <a:t>أ</a:t>
@@ -7690,6 +7738,7 @@
                   <a:srgbClr val="1F2A37"/>
                 </a:solidFill>
                 <a:latin typeface="Amiri" pitchFamily="2" charset="-78"/>
+                <a:ea typeface="Amiri" pitchFamily="2" charset="-78"/>
                 <a:cs typeface="Amiri" pitchFamily="2" charset="-78"/>
               </a:rPr>
               <a:t>ب</a:t>
@@ -7836,6 +7885,7 @@
                   <a:srgbClr val="D4AF37"/>
                 </a:solidFill>
                 <a:latin typeface="Amiri" pitchFamily="2" charset="-78"/>
+                <a:ea typeface="Amiri" pitchFamily="2" charset="-78"/>
                 <a:cs typeface="Amiri" pitchFamily="2" charset="-78"/>
               </a:rPr>
               <a:t>م</a:t>
@@ -8093,6 +8143,7 @@
                   <a:srgbClr val="8A6D1E"/>
                 </a:solidFill>
                 <a:latin typeface="Amiri" pitchFamily="2" charset="-78"/>
+                <a:ea typeface="Amiri" pitchFamily="2" charset="-78"/>
                 <a:cs typeface="Amiri" pitchFamily="2" charset="-78"/>
               </a:rPr>
               <a:t>أ</a:t>
@@ -8157,6 +8208,7 @@
                   <a:srgbClr val="1B3B6F"/>
                 </a:solidFill>
                 <a:latin typeface="Amiri" pitchFamily="2" charset="-78"/>
+                <a:ea typeface="Amiri" pitchFamily="2" charset="-78"/>
                 <a:cs typeface="Amiri" pitchFamily="2" charset="-78"/>
               </a:rPr>
               <a:t>أ</a:t>
@@ -8208,6 +8260,7 @@
                   <a:srgbClr val="8A6D1E"/>
                 </a:solidFill>
                 <a:latin typeface="Amiri" pitchFamily="2" charset="-78"/>
+                <a:ea typeface="Amiri" pitchFamily="2" charset="-78"/>
                 <a:cs typeface="Amiri" pitchFamily="2" charset="-78"/>
               </a:rPr>
               <a:t>نَمُوذَجُ الإِجَابَةِ</a:t>
@@ -8321,6 +8374,7 @@
                   <a:srgbClr val="1F2A37"/>
                 </a:solidFill>
                 <a:latin typeface="Amiri" pitchFamily="2" charset="-78"/>
+                <a:ea typeface="Amiri" pitchFamily="2" charset="-78"/>
                 <a:cs typeface="Amiri" pitchFamily="2" charset="-78"/>
               </a:rPr>
               <a:t>غُرْفَتِي هِيَ أَحَبُّ مَكَانٍ إِلَيَّ فِي البَيْتِ. هِيَ لَيْسَتْ كَبِيرَةً، لٰكِنَّهَا مُرَتَّبَةٌ وَمُرِيحَةٌ. جُدْرَانُهَا خَضْرَاءُ فَاتِحَةٌ، وَسَتَائِرُهَا بَيْضَاءُ. غُرْفَتِي فِي الطَّابِقِ الأَوَّلِ، بِجَانِبِ غُرْفَةِ أُخْتِي.</a:t>
@@ -8340,6 +8394,7 @@
                   <a:srgbClr val="1F2A37"/>
                 </a:solidFill>
                 <a:latin typeface="Amiri" pitchFamily="2" charset="-78"/>
+                <a:ea typeface="Amiri" pitchFamily="2" charset="-78"/>
                 <a:cs typeface="Amiri" pitchFamily="2" charset="-78"/>
               </a:rPr>
               <a:t>فِي غُرْفَتِي سَرِيرٌ بِجَانِبِ الجِدَارِ، وَمَكْتَبٌ أَمَامَ النَّافِذَةِ. فَوْقَ المَكْتَبِ رَفَّانِ لِلْكُتُبِ، وَعَلَى الأَرْضِ سَجَّادَةٌ رَمَادِيَّةٌ نَاعِمَةٌ. خِزَانَةُ المَلَابِسِ كَبِيرَةٌ، وَأَضَعُ فِيهَا مَلَابِسِي وَأَحْذِيَتِي. أَسْتَعْمِلُ المَكْتَبَ لِلدِّرَاسَةِ كُلَّ يَوْمٍ، وَأَسْتَعْمِلُ الرُّفُوفَ لِكُتُبِي وَأَلْعَابِي القَدِيمَةِ.</a:t>
@@ -8359,6 +8414,7 @@
                   <a:srgbClr val="1F2A37"/>
                 </a:solidFill>
                 <a:latin typeface="Amiri" pitchFamily="2" charset="-78"/>
+                <a:ea typeface="Amiri" pitchFamily="2" charset="-78"/>
                 <a:cs typeface="Amiri" pitchFamily="2" charset="-78"/>
               </a:rPr>
               <a:t>فِي الصَّيْفِ المَاضِي غَيَّرْتُ غُرْفَتِي مَعَ أَبِي. صَبَغْنَا الجُدْرَانَ، وَاشْتَرَيْنَا مِصْبَاحًا جَدِيدًا لِلْمَكْتَبِ. عَمِلْنَا ثَلَاثَةَ أَيَّامٍ، وَكَانَ العَمَلُ مُتْعِبًا، لٰكِنَّهُ كَانَ مُمْتِعًا جِدًّا. أُمِّي قَالَتْ إِنَّ الغُرْفَةَ أَصْبَحَتْ أَجْمَلَ غُرْفَةٍ فِي البَيْتِ!</a:t>
@@ -8378,6 +8434,7 @@
                   <a:srgbClr val="1F2A37"/>
                 </a:solidFill>
                 <a:latin typeface="Amiri" pitchFamily="2" charset="-78"/>
+                <a:ea typeface="Amiri" pitchFamily="2" charset="-78"/>
                 <a:cs typeface="Amiri" pitchFamily="2" charset="-78"/>
               </a:rPr>
               <a:t>فِي رَأْيِي، الغُرْفَةُ المُرَتَّبَةُ تُسَاعِدُ عَلَى الدِّرَاسَةِ. فِي المُسْتَقْبَلِ أُرِيدُ أَنْ أَشْتَرِيَ كُرْسِيًّا مُرِيحًا لِلْقِرَاءَةِ، وَسَأَضَعُهُ فِي الزَّاوِيَةِ بِجَانِبِ الرَّفِّ.</a:t>
@@ -8541,11 +8598,12 @@
               <a:buNone/>
             </a:pPr>
             <a:r>
-              <a:rPr lang="en-US" sz="950" b="1" dirty="0">
+              <a:rPr lang="ar-SA" sz="950" b="1" dirty="0">
                 <a:solidFill>
                   <a:srgbClr val="FFFFFF"/>
                 </a:solidFill>
                 <a:latin typeface="Calibri" pitchFamily="34" charset="0"/>
+                <a:ea typeface="Amiri" pitchFamily="2" charset="-78"/>
                 <a:cs typeface="Amiri" pitchFamily="2" charset="-78"/>
               </a:rPr>
               <a:t>لَيْسَتْ كَبِيرَةً، لٰكِنَّهَا</a:t>
@@ -8606,11 +8664,12 @@
               <a:buNone/>
             </a:pPr>
             <a:r>
-              <a:rPr lang="en-US" sz="950" b="1" dirty="0">
+              <a:rPr lang="ar-SA" sz="950" b="1" dirty="0">
                 <a:solidFill>
                   <a:srgbClr val="FFFFFF"/>
                 </a:solidFill>
                 <a:latin typeface="Calibri" pitchFamily="34" charset="0"/>
+                <a:ea typeface="Amiri" pitchFamily="2" charset="-78"/>
                 <a:cs typeface="Amiri" pitchFamily="2" charset="-78"/>
               </a:rPr>
               <a:t>رَفَّانِ</a:t>
@@ -8671,11 +8730,12 @@
               <a:buNone/>
             </a:pPr>
             <a:r>
-              <a:rPr lang="en-US" sz="950" b="1" dirty="0">
+              <a:rPr lang="ar-SA" sz="950" b="1" dirty="0">
                 <a:solidFill>
                   <a:srgbClr val="FFFFFF"/>
                 </a:solidFill>
                 <a:latin typeface="Calibri" pitchFamily="34" charset="0"/>
+                <a:ea typeface="Amiri" pitchFamily="2" charset="-78"/>
                 <a:cs typeface="Amiri" pitchFamily="2" charset="-78"/>
               </a:rPr>
               <a:t>خِزَانَةُ المَلَابِسِ</a:t>
@@ -8736,11 +8796,12 @@
               <a:buNone/>
             </a:pPr>
             <a:r>
-              <a:rPr lang="en-US" sz="950" b="1" dirty="0">
+              <a:rPr lang="ar-SA" sz="950" b="1" dirty="0">
                 <a:solidFill>
                   <a:srgbClr val="FFFFFF"/>
                 </a:solidFill>
                 <a:latin typeface="Calibri" pitchFamily="34" charset="0"/>
+                <a:ea typeface="Amiri" pitchFamily="2" charset="-78"/>
                 <a:cs typeface="Amiri" pitchFamily="2" charset="-78"/>
               </a:rPr>
               <a:t>سَأَضَعُهُ</a:t>
@@ -8874,6 +8935,7 @@
                   <a:srgbClr val="D4AF37"/>
                 </a:solidFill>
                 <a:latin typeface="Amiri" pitchFamily="2" charset="-78"/>
+                <a:ea typeface="Amiri" pitchFamily="2" charset="-78"/>
                 <a:cs typeface="Amiri" pitchFamily="2" charset="-78"/>
               </a:rPr>
               <a:t>م</a:t>
@@ -9131,6 +9193,7 @@
                   <a:srgbClr val="8A6D1E"/>
                 </a:solidFill>
                 <a:latin typeface="Amiri" pitchFamily="2" charset="-78"/>
+                <a:ea typeface="Amiri" pitchFamily="2" charset="-78"/>
                 <a:cs typeface="Amiri" pitchFamily="2" charset="-78"/>
               </a:rPr>
               <a:t>أ</a:t>
@@ -9195,6 +9258,7 @@
                   <a:srgbClr val="1B3B6F"/>
                 </a:solidFill>
                 <a:latin typeface="Amiri" pitchFamily="2" charset="-78"/>
+                <a:ea typeface="Amiri" pitchFamily="2" charset="-78"/>
                 <a:cs typeface="Amiri" pitchFamily="2" charset="-78"/>
               </a:rPr>
               <a:t>أ</a:t>
@@ -9246,6 +9310,7 @@
                   <a:srgbClr val="8A6D1E"/>
                 </a:solidFill>
                 <a:latin typeface="Amiri" pitchFamily="2" charset="-78"/>
+                <a:ea typeface="Amiri" pitchFamily="2" charset="-78"/>
                 <a:cs typeface="Amiri" pitchFamily="2" charset="-78"/>
               </a:rPr>
               <a:t>نَمُوذَجُ الإِجَابَةِ</a:t>
@@ -9359,6 +9424,7 @@
                   <a:srgbClr val="1F2A37"/>
                 </a:solidFill>
                 <a:latin typeface="Amiri" pitchFamily="2" charset="-78"/>
+                <a:ea typeface="Amiri" pitchFamily="2" charset="-78"/>
                 <a:cs typeface="Amiri" pitchFamily="2" charset="-78"/>
               </a:rPr>
               <a:t>يَقُولُونَ إِنَّ غُرْفَةَ الإِنْسَانِ تَعْكِسُ شَخْصِيَّتَهُ، وَأَظُنُّ أَنَّ غُرْفَتِي تَقُولُ عَنِّي إِنِّي أُحِبُّ الكُتُبَ وَالهُدُوءَ. هِيَ لَيْسَتْ وَاسِعَةً، لٰكِنَّ كُلَّ قِطْعَةِ أَثَاثٍ فِيهَا لَهَا مَكَانُهَا وَقِصَّتُهَا.</a:t>
@@ -9378,6 +9444,7 @@
                   <a:srgbClr val="1F2A37"/>
                 </a:solidFill>
                 <a:latin typeface="Amiri" pitchFamily="2" charset="-78"/>
+                <a:ea typeface="Amiri" pitchFamily="2" charset="-78"/>
                 <a:cs typeface="Amiri" pitchFamily="2" charset="-78"/>
               </a:rPr>
               <a:t>أَمَامَ النَّافِذَةِ مَكْتَبٌ خَشَبِيٌّ قَدِيمٌ كَانَ لِجَدِّي، وَقَدْ أَعْطَانِي إِيَّاهُ عِنْدَمَا بَدَأْتُ المَرْحَلَةَ الثَّانَوِيَّةَ. فَوْقَهُ رُفُوفٌ مَلِيئَةٌ بِالكُتُبِ الَّتِي جَمَعْتُهَا مُنْذُ صِغَرِي، أَمَّا السَّرِيرُ فَبِجَانِبِ الجِدَارِ، تَحْتَ صُورَةٍ كَبِيرَةٍ لِمَدِينَةِ القُدْسِ.</a:t>
@@ -9397,6 +9464,7 @@
                   <a:srgbClr val="1F2A37"/>
                 </a:solidFill>
                 <a:latin typeface="Amiri" pitchFamily="2" charset="-78"/>
+                <a:ea typeface="Amiri" pitchFamily="2" charset="-78"/>
                 <a:cs typeface="Amiri" pitchFamily="2" charset="-78"/>
               </a:rPr>
               <a:t>فِي العُطْلَةِ المَاضِيَةِ قَرَّرْتُ أَنْ أُجَدِّدَ الغُرْفَةَ دُونَ أَنْ أُنْفِقَ كَثِيرًا؛ فَصَبَغْتُ الجُدْرَانَ بِلَوْنٍ أَزْرَقَ هَادِئٍ، وَصَنَعْتُ مِنْ صَنَادِيقَ خَشَبِيَّةٍ قَدِيمَةٍ رَفًّا جَدِيدًا، وَنَقَلْتُ المَكْتَبَ لِيَصِلَهُ ضَوْءُ الشَّمْسِ فِي الصَّبَاحِ. لَمْ يُكَلِّفْنِي ذٰلِكَ إِلَّا ثَمَنَ الصَّبْغِ، لٰكِنَّهُ أَخَذَ أُسْبُوعًا كَامِلًا مِنَ العَمَلِ.</a:t>
@@ -9416,6 +9484,7 @@
                   <a:srgbClr val="1F2A37"/>
                 </a:solidFill>
                 <a:latin typeface="Amiri" pitchFamily="2" charset="-78"/>
+                <a:ea typeface="Amiri" pitchFamily="2" charset="-78"/>
                 <a:cs typeface="Amiri" pitchFamily="2" charset="-78"/>
               </a:rPr>
               <a:t>صَحِيحٌ أَنَّ الأَثَاثَ الجَدِيدَ جَمِيلٌ، غَيْرَ أَنَّ الأَشْيَاءَ القَدِيمَةَ تَحْمِلُ ذِكْرَيَاتٍ لَا تُشْتَرَى. وَعِنْدَمَا أَدْرُسُ فِي الجَامِعَةِ، سَآخُذُ مَكْتَبَ جَدِّي مَعِي، وَلَوْ كَانَ ثَقِيلًا جِدًّا، لَأَخَذْتُ مِنْهُ دُرْجًا وَاحِدًا عَلَى الأَقَلِّ!</a:t>
@@ -9514,11 +9583,12 @@
               <a:buNone/>
             </a:pPr>
             <a:r>
-              <a:rPr lang="en-US" sz="950" b="1" dirty="0">
+              <a:rPr lang="ar-SA" sz="950" b="1" dirty="0">
                 <a:solidFill>
                   <a:srgbClr val="FFFFFF"/>
                 </a:solidFill>
                 <a:latin typeface="Calibri" pitchFamily="34" charset="0"/>
+                <a:ea typeface="Amiri" pitchFamily="2" charset="-78"/>
                 <a:cs typeface="Amiri" pitchFamily="2" charset="-78"/>
               </a:rPr>
               <a:t>كَانَ لِجَدِّي</a:t>
@@ -9579,11 +9649,12 @@
               <a:buNone/>
             </a:pPr>
             <a:r>
-              <a:rPr lang="en-US" sz="950" b="1" dirty="0">
+              <a:rPr lang="ar-SA" sz="950" b="1" dirty="0">
                 <a:solidFill>
                   <a:srgbClr val="FFFFFF"/>
                 </a:solidFill>
                 <a:latin typeface="Calibri" pitchFamily="34" charset="0"/>
+                <a:ea typeface="Amiri" pitchFamily="2" charset="-78"/>
                 <a:cs typeface="Amiri" pitchFamily="2" charset="-78"/>
               </a:rPr>
               <a:t>الَّتِي جَمَعْتُهَا</a:t>
@@ -9644,11 +9715,12 @@
               <a:buNone/>
             </a:pPr>
             <a:r>
-              <a:rPr lang="en-US" sz="950" b="1" dirty="0">
+              <a:rPr lang="ar-SA" sz="950" b="1" dirty="0">
                 <a:solidFill>
                   <a:srgbClr val="FFFFFF"/>
                 </a:solidFill>
                 <a:latin typeface="Calibri" pitchFamily="34" charset="0"/>
+                <a:ea typeface="Amiri" pitchFamily="2" charset="-78"/>
                 <a:cs typeface="Amiri" pitchFamily="2" charset="-78"/>
               </a:rPr>
               <a:t>دُونَ أَنْ أُنْفِقَ</a:t>
@@ -9709,11 +9781,12 @@
               <a:buNone/>
             </a:pPr>
             <a:r>
-              <a:rPr lang="en-US" sz="950" b="1" dirty="0">
+              <a:rPr lang="ar-SA" sz="950" b="1" dirty="0">
                 <a:solidFill>
                   <a:srgbClr val="FFFFFF"/>
                 </a:solidFill>
                 <a:latin typeface="Calibri" pitchFamily="34" charset="0"/>
+                <a:ea typeface="Amiri" pitchFamily="2" charset="-78"/>
                 <a:cs typeface="Amiri" pitchFamily="2" charset="-78"/>
               </a:rPr>
               <a:t>لَوْ كَانَ … لَأَخَذْتُ</a:t>
@@ -9847,6 +9920,7 @@
                   <a:srgbClr val="D4AF37"/>
                 </a:solidFill>
                 <a:latin typeface="Amiri" pitchFamily="2" charset="-78"/>
+                <a:ea typeface="Amiri" pitchFamily="2" charset="-78"/>
                 <a:cs typeface="Amiri" pitchFamily="2" charset="-78"/>
               </a:rPr>
               <a:t>م</a:t>
@@ -10104,6 +10178,7 @@
                   <a:srgbClr val="8A6D1E"/>
                 </a:solidFill>
                 <a:latin typeface="Amiri" pitchFamily="2" charset="-78"/>
+                <a:ea typeface="Amiri" pitchFamily="2" charset="-78"/>
                 <a:cs typeface="Amiri" pitchFamily="2" charset="-78"/>
               </a:rPr>
               <a:t>ب</a:t>
@@ -10168,6 +10243,7 @@
                   <a:srgbClr val="1B3B6F"/>
                 </a:solidFill>
                 <a:latin typeface="Amiri" pitchFamily="2" charset="-78"/>
+                <a:ea typeface="Amiri" pitchFamily="2" charset="-78"/>
                 <a:cs typeface="Amiri" pitchFamily="2" charset="-78"/>
               </a:rPr>
               <a:t>ب</a:t>
@@ -10219,6 +10295,7 @@
                   <a:srgbClr val="8A6D1E"/>
                 </a:solidFill>
                 <a:latin typeface="Amiri" pitchFamily="2" charset="-78"/>
+                <a:ea typeface="Amiri" pitchFamily="2" charset="-78"/>
                 <a:cs typeface="Amiri" pitchFamily="2" charset="-78"/>
               </a:rPr>
               <a:t>نَمُوذَجُ الإِجَابَةِ</a:t>
@@ -10332,6 +10409,7 @@
                   <a:srgbClr val="1F2A37"/>
                 </a:solidFill>
                 <a:latin typeface="Amiri" pitchFamily="2" charset="-78"/>
+                <a:ea typeface="Amiri" pitchFamily="2" charset="-78"/>
                 <a:cs typeface="Amiri" pitchFamily="2" charset="-78"/>
               </a:rPr>
               <a:t>امْتَلَأَتْ بُيُوتُنَا اليَوْمَ بِالأَجْهِزَةِ الكَهْرَبَائِيَّةِ: غَسَّالَاتٌ وَثَلَّاجَاتٌ وَأَفْرَانٌ، وَحَتَّى مَكَانِسُ تَعْمَلُ وَحْدَهَا، وَمَصَابِيحُ نُشَغِّلُهَا بِالهَاتِفِ أَوْ بِالصَّوْتِ. وَهٰذِهِ الأَجْهِزَةُ تُوَفِّرُ عَلَيْنَا سَاعَاتٍ طَوِيلَةً كَانَ أَجْدَادُنَا يَقْضُونَهَا فِي أَعْمَالِ البَيْتِ.</a:t>
@@ -10351,6 +10429,7 @@
                   <a:srgbClr val="1F2A37"/>
                 </a:solidFill>
                 <a:latin typeface="Amiri" pitchFamily="2" charset="-78"/>
+                <a:ea typeface="Amiri" pitchFamily="2" charset="-78"/>
                 <a:cs typeface="Amiri" pitchFamily="2" charset="-78"/>
               </a:rPr>
               <a:t>فِي المَاضِي كَانَتْ جَدَّتِي تَغْسِلُ مَلَابِسَ عَشَرَةِ أَشْخَاصٍ بِيَدَيْهَا، وَتَخْبِزُ الخُبْزَ فِي فُرْنٍ مِنَ الطِّينِ كُلَّ صَبَاحٍ، أَمَّا أُمِّي فَتُشَغِّلُ الغَسَّالَةَ بِضَغْطَةِ زِرٍّ، وَتَشْتَرِي الخُبْزَ جَاهِزًا مِنَ المَخْبَزِ، فَيَبْقَى عِنْدَهَا وَقْتٌ لِعَمَلِهَا وَلَنَا.</a:t>
@@ -10370,6 +10449,7 @@
                   <a:srgbClr val="1F2A37"/>
                 </a:solidFill>
                 <a:latin typeface="Amiri" pitchFamily="2" charset="-78"/>
+                <a:ea typeface="Amiri" pitchFamily="2" charset="-78"/>
                 <a:cs typeface="Amiri" pitchFamily="2" charset="-78"/>
               </a:rPr>
               <a:t>لٰكِنَّ لِهٰذِهِ الرَّاحَةِ ثَمَنًا. فِي الشِّتَاءِ المَاضِي انْقَطَعَتِ الكَهْرَبَاءُ فِي حَيِّنَا يَوْمَيْنِ، فَتَوَقَّفَ كُلُّ شَيْءٍ فِي البَيْتِ، وَلَمْ نَعْرِفْ كَيْفَ نَطْبُخُ أَوْ نُدَفِّئُ أَنْفُسَنَا. حِينَئِذٍ فَهِمْتُ كَمْ أَصْبَحْنَا نَعْتَمِدُ عَلَى الآلَاتِ، بَيْنَمَا كَانَتْ جَدَّتِي تَضْحَكُ وَتُشْعِلُ النَّارَ لِتَطْبُخَ لَنَا.</a:t>
@@ -10389,6 +10469,7 @@
                   <a:srgbClr val="1F2A37"/>
                 </a:solidFill>
                 <a:latin typeface="Amiri" pitchFamily="2" charset="-78"/>
+                <a:ea typeface="Amiri" pitchFamily="2" charset="-78"/>
                 <a:cs typeface="Amiri" pitchFamily="2" charset="-78"/>
               </a:rPr>
               <a:t>صَحِيحٌ أَنَّ الأَجْهِزَةَ الحَدِيثَةَ نِعْمَةٌ، غَيْرَ أَنَّهَا تَسْتَهْلِكُ طَاقَةً كَثِيرَةً، وَتَجْعَلُنَا نَنْسَى مَهَارَاتٍ مُهِمَّةً. وَلَوْ تَعَلَّمَ كُلُّ شَابٍّ بَعْضَ هٰذِهِ المَهَارَاتِ القَدِيمَةِ، لَمَا خَافَ مِنِ انْقِطَاعِ الكَهْرَبَاءِ أَبَدًا، وَلَعَاشَ حَيَاةً أَبْسَطَ.</a:t>
@@ -10487,11 +10568,12 @@
               <a:buNone/>
             </a:pPr>
             <a:r>
-              <a:rPr lang="en-US" sz="950" b="1" dirty="0">
+              <a:rPr lang="ar-SA" sz="950" b="1" dirty="0">
                 <a:solidFill>
                   <a:srgbClr val="FFFFFF"/>
                 </a:solidFill>
                 <a:latin typeface="Calibri" pitchFamily="34" charset="0"/>
+                <a:ea typeface="Amiri" pitchFamily="2" charset="-78"/>
                 <a:cs typeface="Amiri" pitchFamily="2" charset="-78"/>
               </a:rPr>
               <a:t>كَانَ أَجْدَادُنَا يَقْضُونَهَا</a:t>
@@ -10552,11 +10634,12 @@
               <a:buNone/>
             </a:pPr>
             <a:r>
-              <a:rPr lang="en-US" sz="950" b="1" dirty="0">
+              <a:rPr lang="ar-SA" sz="950" b="1" dirty="0">
                 <a:solidFill>
                   <a:srgbClr val="FFFFFF"/>
                 </a:solidFill>
                 <a:latin typeface="Calibri" pitchFamily="34" charset="0"/>
+                <a:ea typeface="Amiri" pitchFamily="2" charset="-78"/>
                 <a:cs typeface="Amiri" pitchFamily="2" charset="-78"/>
               </a:rPr>
               <a:t>أَمَّا أُمِّي فَتُشَغِّلُ</a:t>
@@ -10617,11 +10700,12 @@
               <a:buNone/>
             </a:pPr>
             <a:r>
-              <a:rPr lang="en-US" sz="950" b="1" dirty="0">
+              <a:rPr lang="ar-SA" sz="950" b="1" dirty="0">
                 <a:solidFill>
                   <a:srgbClr val="FFFFFF"/>
                 </a:solidFill>
                 <a:latin typeface="Calibri" pitchFamily="34" charset="0"/>
+                <a:ea typeface="Amiri" pitchFamily="2" charset="-78"/>
                 <a:cs typeface="Amiri" pitchFamily="2" charset="-78"/>
               </a:rPr>
               <a:t>وَلَمْ نَعْرِفْ كَيْفَ</a:t>
@@ -10682,11 +10766,12 @@
               <a:buNone/>
             </a:pPr>
             <a:r>
-              <a:rPr lang="en-US" sz="950" b="1" dirty="0">
+              <a:rPr lang="ar-SA" sz="950" b="1" dirty="0">
                 <a:solidFill>
                   <a:srgbClr val="FFFFFF"/>
                 </a:solidFill>
                 <a:latin typeface="Calibri" pitchFamily="34" charset="0"/>
+                <a:ea typeface="Amiri" pitchFamily="2" charset="-78"/>
                 <a:cs typeface="Amiri" pitchFamily="2" charset="-78"/>
               </a:rPr>
               <a:t>لَوْ تَعَلَّمَ … لَمَا خَافَ</a:t>
@@ -10820,6 +10905,7 @@
                   <a:srgbClr val="D4AF37"/>
                 </a:solidFill>
                 <a:latin typeface="Amiri" pitchFamily="2" charset="-78"/>
+                <a:ea typeface="Amiri" pitchFamily="2" charset="-78"/>
                 <a:cs typeface="Amiri" pitchFamily="2" charset="-78"/>
               </a:rPr>
               <a:t>م</a:t>
@@ -11140,6 +11226,7 @@
                   <a:srgbClr val="8A6D1E"/>
                 </a:solidFill>
                 <a:latin typeface="Amiri" pitchFamily="2" charset="-78"/>
+                <a:ea typeface="Amiri" pitchFamily="2" charset="-78"/>
                 <a:cs typeface="Amiri" pitchFamily="2" charset="-78"/>
               </a:rPr>
               <a:t>قَيِّمْ عَمَلَكَ</a:t>
@@ -12384,6 +12471,7 @@
                   <a:srgbClr val="FFFFFF"/>
                 </a:solidFill>
                 <a:latin typeface="Amiri" pitchFamily="2" charset="-78"/>
+                <a:ea typeface="Amiri" pitchFamily="2" charset="-78"/>
                 <a:cs typeface="Amiri" pitchFamily="2" charset="-78"/>
               </a:rPr>
               <a:t>أَحْسَنْتُمْ! إِلَى اللِّقَاءِ</a:t>
@@ -12536,6 +12624,7 @@
                   <a:srgbClr val="D4AF37"/>
                 </a:solidFill>
                 <a:latin typeface="Amiri" pitchFamily="2" charset="-78"/>
+                <a:ea typeface="Amiri" pitchFamily="2" charset="-78"/>
                 <a:cs typeface="Amiri" pitchFamily="2" charset="-78"/>
               </a:rPr>
               <a:t>وَرْشَةُ التَّدْرِيبِ</a:t>
@@ -12669,6 +12758,7 @@
                   <a:srgbClr val="D4AF37"/>
                 </a:solidFill>
                 <a:latin typeface="Amiri" pitchFamily="2" charset="-78"/>
+                <a:ea typeface="Amiri" pitchFamily="2" charset="-78"/>
                 <a:cs typeface="Amiri" pitchFamily="2" charset="-78"/>
               </a:rPr>
               <a:t>م</a:t>
@@ -12989,6 +13079,7 @@
                   <a:srgbClr val="8A6D1E"/>
                 </a:solidFill>
                 <a:latin typeface="Amiri" pitchFamily="2" charset="-78"/>
+                <a:ea typeface="Amiri" pitchFamily="2" charset="-78"/>
                 <a:cs typeface="Amiri" pitchFamily="2" charset="-78"/>
               </a:rPr>
               <a:t>آدَابُ الصَّفِّ</a:t>
@@ -14520,6 +14611,7 @@
                   <a:srgbClr val="D4AF37"/>
                 </a:solidFill>
                 <a:latin typeface="Amiri" pitchFamily="2" charset="-78"/>
+                <a:ea typeface="Amiri" pitchFamily="2" charset="-78"/>
                 <a:cs typeface="Amiri" pitchFamily="2" charset="-78"/>
               </a:rPr>
               <a:t>م</a:t>
@@ -14840,6 +14932,7 @@
                   <a:srgbClr val="8A6D1E"/>
                 </a:solidFill>
                 <a:latin typeface="Amiri" pitchFamily="2" charset="-78"/>
+                <a:ea typeface="Amiri" pitchFamily="2" charset="-78"/>
                 <a:cs typeface="Amiri" pitchFamily="2" charset="-78"/>
               </a:rPr>
               <a:t>خَرِيطَةُ الوَرْشَةِ</a:t>
@@ -15154,6 +15247,7 @@
                   <a:srgbClr val="1B3B6F"/>
                 </a:solidFill>
                 <a:latin typeface="Amiri" pitchFamily="2" charset="-78"/>
+                <a:ea typeface="Amiri" pitchFamily="2" charset="-78"/>
                 <a:cs typeface="Amiri" pitchFamily="2" charset="-78"/>
               </a:rPr>
               <a:t>كَيْفَ</a:t>
@@ -15430,6 +15524,7 @@
                   <a:srgbClr val="1E6B52"/>
                 </a:solidFill>
                 <a:latin typeface="Amiri" pitchFamily="2" charset="-78"/>
+                <a:ea typeface="Amiri" pitchFamily="2" charset="-78"/>
                 <a:cs typeface="Amiri" pitchFamily="2" charset="-78"/>
               </a:rPr>
               <a:t>الاسْتِمَارَةُ</a:t>
@@ -15706,6 +15801,7 @@
                   <a:srgbClr val="1E6B52"/>
                 </a:solidFill>
                 <a:latin typeface="Amiri" pitchFamily="2" charset="-78"/>
+                <a:ea typeface="Amiri" pitchFamily="2" charset="-78"/>
                 <a:cs typeface="Amiri" pitchFamily="2" charset="-78"/>
               </a:rPr>
               <a:t>الرِّسَالَةُ</a:t>
@@ -15982,6 +16078,7 @@
                   <a:srgbClr val="1E6B52"/>
                 </a:solidFill>
                 <a:latin typeface="Amiri" pitchFamily="2" charset="-78"/>
+                <a:ea typeface="Amiri" pitchFamily="2" charset="-78"/>
                 <a:cs typeface="Amiri" pitchFamily="2" charset="-78"/>
               </a:rPr>
               <a:t>المَقَالُ</a:t>
@@ -16258,6 +16355,7 @@
                   <a:srgbClr val="8A6D1E"/>
                 </a:solidFill>
                 <a:latin typeface="Amiri" pitchFamily="2" charset="-78"/>
+                <a:ea typeface="Amiri" pitchFamily="2" charset="-78"/>
                 <a:cs typeface="Amiri" pitchFamily="2" charset="-78"/>
               </a:rPr>
               <a:t>قَيِّمْ</a:t>
@@ -16501,6 +16599,7 @@
                   <a:srgbClr val="D4AF37"/>
                 </a:solidFill>
                 <a:latin typeface="Amiri" pitchFamily="2" charset="-78"/>
+                <a:ea typeface="Amiri" pitchFamily="2" charset="-78"/>
                 <a:cs typeface="Amiri" pitchFamily="2" charset="-78"/>
               </a:rPr>
               <a:t>م</a:t>
@@ -16821,6 +16920,7 @@
                   <a:srgbClr val="8A6D1E"/>
                 </a:solidFill>
                 <a:latin typeface="Amiri" pitchFamily="2" charset="-78"/>
+                <a:ea typeface="Amiri" pitchFamily="2" charset="-78"/>
                 <a:cs typeface="Amiri" pitchFamily="2" charset="-78"/>
               </a:rPr>
               <a:t>امْتِحَانُ الكِتَابَةِ</a:t>
@@ -17445,6 +17545,7 @@
                   <a:srgbClr val="1B3B6F"/>
                 </a:solidFill>
                 <a:latin typeface="Amiri" pitchFamily="2" charset="-78"/>
+                <a:ea typeface="Amiri" pitchFamily="2" charset="-78"/>
                 <a:cs typeface="Amiri" pitchFamily="2" charset="-78"/>
               </a:rPr>
               <a:t>وَضَعْتُ المَكْتَبَ بِجَانِبِ النَّافِذَةِ</a:t>
@@ -17544,6 +17645,7 @@
                   <a:srgbClr val="1B3B6F"/>
                 </a:solidFill>
                 <a:latin typeface="Amiri" pitchFamily="2" charset="-78"/>
+                <a:ea typeface="Amiri" pitchFamily="2" charset="-78"/>
                 <a:cs typeface="Amiri" pitchFamily="2" charset="-78"/>
               </a:rPr>
               <a:t>الغَسَّالَةُ الَّتِي اشْتَرَيْنَاهَا تَعَطَّلَتْ</a:t>
@@ -17643,6 +17745,7 @@
                   <a:srgbClr val="1B3B6F"/>
                 </a:solidFill>
                 <a:latin typeface="Amiri" pitchFamily="2" charset="-78"/>
+                <a:ea typeface="Amiri" pitchFamily="2" charset="-78"/>
                 <a:cs typeface="Amiri" pitchFamily="2" charset="-78"/>
               </a:rPr>
               <a:t>صَبَغْتُهُ بَدَلًا مِنْ أَنْ أَشْتَرِيَ وَاحِدًا جَدِيدًا</a:t>
@@ -17814,6 +17917,7 @@
                   <a:srgbClr val="D4AF37"/>
                 </a:solidFill>
                 <a:latin typeface="Amiri" pitchFamily="2" charset="-78"/>
+                <a:ea typeface="Amiri" pitchFamily="2" charset="-78"/>
                 <a:cs typeface="Amiri" pitchFamily="2" charset="-78"/>
               </a:rPr>
               <a:t>م</a:t>
@@ -18134,6 +18238,7 @@
                   <a:srgbClr val="8A6D1E"/>
                 </a:solidFill>
                 <a:latin typeface="Amiri" pitchFamily="2" charset="-78"/>
+                <a:ea typeface="Amiri" pitchFamily="2" charset="-78"/>
                 <a:cs typeface="Amiri" pitchFamily="2" charset="-78"/>
               </a:rPr>
               <a:t>اسْتِمَارَةُ تَوْصِيلِ الأَثَاثِ</a:t>
@@ -18490,6 +18595,7 @@
                   <a:srgbClr val="1B3B6F"/>
                 </a:solidFill>
                 <a:latin typeface="Amiri" pitchFamily="2" charset="-78"/>
+                <a:ea typeface="Amiri" pitchFamily="2" charset="-78"/>
                 <a:cs typeface="Amiri" pitchFamily="2" charset="-78"/>
               </a:rPr>
               <a:t>اسْمُ الزَّبُونِ</a:t>
@@ -18734,6 +18840,7 @@
                   <a:srgbClr val="1B3B6F"/>
                 </a:solidFill>
                 <a:latin typeface="Amiri" pitchFamily="2" charset="-78"/>
+                <a:ea typeface="Amiri" pitchFamily="2" charset="-78"/>
                 <a:cs typeface="Amiri" pitchFamily="2" charset="-78"/>
               </a:rPr>
               <a:t>العُنْوَانُ</a:t>
@@ -18978,6 +19085,7 @@
                   <a:srgbClr val="1B3B6F"/>
                 </a:solidFill>
                 <a:latin typeface="Amiri" pitchFamily="2" charset="-78"/>
+                <a:ea typeface="Amiri" pitchFamily="2" charset="-78"/>
                 <a:cs typeface="Amiri" pitchFamily="2" charset="-78"/>
               </a:rPr>
               <a:t>القِطْعَةُ</a:t>
@@ -19222,6 +19330,7 @@
                   <a:srgbClr val="1B3B6F"/>
                 </a:solidFill>
                 <a:latin typeface="Amiri" pitchFamily="2" charset="-78"/>
+                <a:ea typeface="Amiri" pitchFamily="2" charset="-78"/>
                 <a:cs typeface="Amiri" pitchFamily="2" charset="-78"/>
               </a:rPr>
               <a:t>اللَّوْنُ</a:t>
@@ -19466,6 +19575,7 @@
                   <a:srgbClr val="1B3B6F"/>
                 </a:solidFill>
                 <a:latin typeface="Amiri" pitchFamily="2" charset="-78"/>
+                <a:ea typeface="Amiri" pitchFamily="2" charset="-78"/>
                 <a:cs typeface="Amiri" pitchFamily="2" charset="-78"/>
               </a:rPr>
               <a:t>الغُرْفَةُ</a:t>
@@ -19710,6 +19820,7 @@
                   <a:srgbClr val="1B3B6F"/>
                 </a:solidFill>
                 <a:latin typeface="Amiri" pitchFamily="2" charset="-78"/>
+                <a:ea typeface="Amiri" pitchFamily="2" charset="-78"/>
                 <a:cs typeface="Amiri" pitchFamily="2" charset="-78"/>
               </a:rPr>
               <a:t>يَوْمُ التَّوْصِيلِ وَوَقْتُهُ</a:t>
@@ -19954,6 +20065,7 @@
                   <a:srgbClr val="1B3B6F"/>
                 </a:solidFill>
                 <a:latin typeface="Amiri" pitchFamily="2" charset="-78"/>
+                <a:ea typeface="Amiri" pitchFamily="2" charset="-78"/>
                 <a:cs typeface="Amiri" pitchFamily="2" charset="-78"/>
               </a:rPr>
               <a:t>فِي أَيِّ طَابِقٍ؟ هَلْ يُوجَدُ مِصْعَدٌ؟</a:t>
@@ -20133,6 +20245,7 @@
                   <a:srgbClr val="1B3B6F"/>
                 </a:solidFill>
                 <a:latin typeface="Amiri" pitchFamily="2" charset="-78"/>
+                <a:ea typeface="Amiri" pitchFamily="2" charset="-78"/>
                 <a:cs typeface="Amiri" pitchFamily="2" charset="-78"/>
               </a:rPr>
               <a:t>جُمْلَةٌ: أَيْنَ سَتَضَعُ المَكْتَبَ؟</a:t>
@@ -20342,6 +20455,7 @@
                   <a:srgbClr val="D4AF37"/>
                 </a:solidFill>
                 <a:latin typeface="Amiri" pitchFamily="2" charset="-78"/>
+                <a:ea typeface="Amiri" pitchFamily="2" charset="-78"/>
                 <a:cs typeface="Amiri" pitchFamily="2" charset="-78"/>
               </a:rPr>
               <a:t>م</a:t>
@@ -20662,6 +20776,7 @@
                   <a:srgbClr val="8A6D1E"/>
                 </a:solidFill>
                 <a:latin typeface="Amiri" pitchFamily="2" charset="-78"/>
+                <a:ea typeface="Amiri" pitchFamily="2" charset="-78"/>
                 <a:cs typeface="Amiri" pitchFamily="2" charset="-78"/>
               </a:rPr>
               <a:t>نَمُوذَجُ الإِجَابَةِ</a:t>
@@ -20980,6 +21095,7 @@
                   <a:srgbClr val="1B3B6F"/>
                 </a:solidFill>
                 <a:latin typeface="Amiri" pitchFamily="2" charset="-78"/>
+                <a:ea typeface="Amiri" pitchFamily="2" charset="-78"/>
                 <a:cs typeface="Amiri" pitchFamily="2" charset="-78"/>
               </a:rPr>
               <a:t>رِيمُ يُوسُفُ</a:t>
@@ -21018,6 +21134,7 @@
                   <a:srgbClr val="1B3B6F"/>
                 </a:solidFill>
                 <a:latin typeface="Amiri" pitchFamily="2" charset="-78"/>
+                <a:ea typeface="Amiri" pitchFamily="2" charset="-78"/>
                 <a:cs typeface="Amiri" pitchFamily="2" charset="-78"/>
               </a:rPr>
               <a:t>اسْمُ الزَّبُونِ</a:t>
@@ -21159,6 +21276,7 @@
                   <a:srgbClr val="1B3B6F"/>
                 </a:solidFill>
                 <a:latin typeface="Amiri" pitchFamily="2" charset="-78"/>
+                <a:ea typeface="Amiri" pitchFamily="2" charset="-78"/>
                 <a:cs typeface="Amiri" pitchFamily="2" charset="-78"/>
               </a:rPr>
               <a:t>١٤ شَارِعُ الحَدِيقَةِ</a:t>
@@ -21197,6 +21315,7 @@
                   <a:srgbClr val="1B3B6F"/>
                 </a:solidFill>
                 <a:latin typeface="Amiri" pitchFamily="2" charset="-78"/>
+                <a:ea typeface="Amiri" pitchFamily="2" charset="-78"/>
                 <a:cs typeface="Amiri" pitchFamily="2" charset="-78"/>
               </a:rPr>
               <a:t>العُنْوَانُ</a:t>
@@ -21338,6 +21457,7 @@
                   <a:srgbClr val="1B3B6F"/>
                 </a:solidFill>
                 <a:latin typeface="Amiri" pitchFamily="2" charset="-78"/>
+                <a:ea typeface="Amiri" pitchFamily="2" charset="-78"/>
                 <a:cs typeface="Amiri" pitchFamily="2" charset="-78"/>
               </a:rPr>
               <a:t>سَرِيرٌ وَمَكْتَبٌ</a:t>
@@ -21376,6 +21496,7 @@
                   <a:srgbClr val="1B3B6F"/>
                 </a:solidFill>
                 <a:latin typeface="Amiri" pitchFamily="2" charset="-78"/>
+                <a:ea typeface="Amiri" pitchFamily="2" charset="-78"/>
                 <a:cs typeface="Amiri" pitchFamily="2" charset="-78"/>
               </a:rPr>
               <a:t>القِطْعَةُ</a:t>
@@ -21517,6 +21638,7 @@
                   <a:srgbClr val="1B3B6F"/>
                 </a:solidFill>
                 <a:latin typeface="Amiri" pitchFamily="2" charset="-78"/>
+                <a:ea typeface="Amiri" pitchFamily="2" charset="-78"/>
                 <a:cs typeface="Amiri" pitchFamily="2" charset="-78"/>
               </a:rPr>
               <a:t>أَبْيَضُ</a:t>
@@ -21555,6 +21677,7 @@
                   <a:srgbClr val="1B3B6F"/>
                 </a:solidFill>
                 <a:latin typeface="Amiri" pitchFamily="2" charset="-78"/>
+                <a:ea typeface="Amiri" pitchFamily="2" charset="-78"/>
                 <a:cs typeface="Amiri" pitchFamily="2" charset="-78"/>
               </a:rPr>
               <a:t>اللَّوْنُ</a:t>
@@ -21696,6 +21819,7 @@
                   <a:srgbClr val="1B3B6F"/>
                 </a:solidFill>
                 <a:latin typeface="Amiri" pitchFamily="2" charset="-78"/>
+                <a:ea typeface="Amiri" pitchFamily="2" charset="-78"/>
                 <a:cs typeface="Amiri" pitchFamily="2" charset="-78"/>
               </a:rPr>
               <a:t>غُرْفَةُ النَّوْمِ</a:t>
@@ -21734,6 +21858,7 @@
                   <a:srgbClr val="1B3B6F"/>
                 </a:solidFill>
                 <a:latin typeface="Amiri" pitchFamily="2" charset="-78"/>
+                <a:ea typeface="Amiri" pitchFamily="2" charset="-78"/>
                 <a:cs typeface="Amiri" pitchFamily="2" charset="-78"/>
               </a:rPr>
               <a:t>الغُرْفَةُ</a:t>
@@ -21875,6 +22000,7 @@
                   <a:srgbClr val="1B3B6F"/>
                 </a:solidFill>
                 <a:latin typeface="Amiri" pitchFamily="2" charset="-78"/>
+                <a:ea typeface="Amiri" pitchFamily="2" charset="-78"/>
                 <a:cs typeface="Amiri" pitchFamily="2" charset="-78"/>
               </a:rPr>
               <a:t>السَّبْتُ، العَاشِرَةُ صَبَاحًا</a:t>
@@ -21913,6 +22039,7 @@
                   <a:srgbClr val="1B3B6F"/>
                 </a:solidFill>
                 <a:latin typeface="Amiri" pitchFamily="2" charset="-78"/>
+                <a:ea typeface="Amiri" pitchFamily="2" charset="-78"/>
                 <a:cs typeface="Amiri" pitchFamily="2" charset="-78"/>
               </a:rPr>
               <a:t>يَوْمُ التَّوْصِيلِ وَوَقْتُهُ</a:t>
@@ -22054,6 +22181,7 @@
                   <a:srgbClr val="1B3B6F"/>
                 </a:solidFill>
                 <a:latin typeface="Amiri" pitchFamily="2" charset="-78"/>
+                <a:ea typeface="Amiri" pitchFamily="2" charset="-78"/>
                 <a:cs typeface="Amiri" pitchFamily="2" charset="-78"/>
               </a:rPr>
               <a:t>الطَّابِقُ الثَّالِثُ، لَا يُوجَدُ مِصْعَدٌ</a:t>
@@ -22092,6 +22220,7 @@
                   <a:srgbClr val="1B3B6F"/>
                 </a:solidFill>
                 <a:latin typeface="Amiri" pitchFamily="2" charset="-78"/>
+                <a:ea typeface="Amiri" pitchFamily="2" charset="-78"/>
                 <a:cs typeface="Amiri" pitchFamily="2" charset="-78"/>
               </a:rPr>
               <a:t>فِي أَيِّ طَابِقٍ؟ هَلْ يُوجَدُ مِصْعَدٌ؟</a:t>
@@ -22233,6 +22362,7 @@
                   <a:srgbClr val="1B3B6F"/>
                 </a:solidFill>
                 <a:latin typeface="Amiri" pitchFamily="2" charset="-78"/>
+                <a:ea typeface="Amiri" pitchFamily="2" charset="-78"/>
                 <a:cs typeface="Amiri" pitchFamily="2" charset="-78"/>
               </a:rPr>
               <a:t>سَأَضَعُهُ بِجَانِبِ النَّافِذَةِ لِأَنَّ الضَّوْءَ هُنَاكَ جَيِّدٌ.</a:t>
@@ -22271,6 +22401,7 @@
                   <a:srgbClr val="1B3B6F"/>
                 </a:solidFill>
                 <a:latin typeface="Amiri" pitchFamily="2" charset="-78"/>
+                <a:ea typeface="Amiri" pitchFamily="2" charset="-78"/>
                 <a:cs typeface="Amiri" pitchFamily="2" charset="-78"/>
               </a:rPr>
               <a:t>جُمْلَةٌ: أَيْنَ سَتَضَعُ المَكْتَبَ؟</a:t>
@@ -22480,6 +22611,7 @@
                   <a:srgbClr val="D4AF37"/>
                 </a:solidFill>
                 <a:latin typeface="Amiri" pitchFamily="2" charset="-78"/>
+                <a:ea typeface="Amiri" pitchFamily="2" charset="-78"/>
                 <a:cs typeface="Amiri" pitchFamily="2" charset="-78"/>
               </a:rPr>
               <a:t>م</a:t>
@@ -22800,6 +22932,7 @@
                   <a:srgbClr val="8A6D1E"/>
                 </a:solidFill>
                 <a:latin typeface="Amiri" pitchFamily="2" charset="-78"/>
+                <a:ea typeface="Amiri" pitchFamily="2" charset="-78"/>
                 <a:cs typeface="Amiri" pitchFamily="2" charset="-78"/>
               </a:rPr>
               <a:t>رِسَالَةٌ عَنْ غُرْفَتِي</a:t>
@@ -23275,6 +23408,7 @@
                   <a:srgbClr val="1B3B6F"/>
                 </a:solidFill>
                 <a:latin typeface="Amiri" pitchFamily="2" charset="-78"/>
+                <a:ea typeface="Amiri" pitchFamily="2" charset="-78"/>
                 <a:cs typeface="Amiri" pitchFamily="2" charset="-78"/>
               </a:rPr>
               <a:t>اشْتَرَيْتُ … وَغَيَّرْتُ …</a:t>
@@ -23351,6 +23485,7 @@
                   <a:srgbClr val="1B3B6F"/>
                 </a:solidFill>
                 <a:latin typeface="Amiri" pitchFamily="2" charset="-78"/>
+                <a:ea typeface="Amiri" pitchFamily="2" charset="-78"/>
                 <a:cs typeface="Amiri" pitchFamily="2" charset="-78"/>
               </a:rPr>
               <a:t>وَضَعْتُ … بِجَانِبِ …</a:t>
@@ -23427,6 +23562,7 @@
                   <a:srgbClr val="1B3B6F"/>
                 </a:solidFill>
                 <a:latin typeface="Amiri" pitchFamily="2" charset="-78"/>
+                <a:ea typeface="Amiri" pitchFamily="2" charset="-78"/>
                 <a:cs typeface="Amiri" pitchFamily="2" charset="-78"/>
               </a:rPr>
               <a:t>… مُعَطَّلَةٌ مُنْذُ …</a:t>
@@ -23503,6 +23639,7 @@
                   <a:srgbClr val="1B3B6F"/>
                 </a:solidFill>
                 <a:latin typeface="Amiri" pitchFamily="2" charset="-78"/>
+                <a:ea typeface="Amiri" pitchFamily="2" charset="-78"/>
                 <a:cs typeface="Amiri" pitchFamily="2" charset="-78"/>
               </a:rPr>
               <a:t>سَيَأْتِي الفَنِّيُّ لِيُصْلِحَهَا</a:t>
@@ -23674,6 +23811,7 @@
                   <a:srgbClr val="D4AF37"/>
                 </a:solidFill>
                 <a:latin typeface="Amiri" pitchFamily="2" charset="-78"/>
+                <a:ea typeface="Amiri" pitchFamily="2" charset="-78"/>
                 <a:cs typeface="Amiri" pitchFamily="2" charset="-78"/>
               </a:rPr>
               <a:t>م</a:t>
@@ -23994,6 +24132,7 @@
                   <a:srgbClr val="8A6D1E"/>
                 </a:solidFill>
                 <a:latin typeface="Amiri" pitchFamily="2" charset="-78"/>
+                <a:ea typeface="Amiri" pitchFamily="2" charset="-78"/>
                 <a:cs typeface="Amiri" pitchFamily="2" charset="-78"/>
               </a:rPr>
               <a:t>نَصُّ السُّؤَالِ</a:t>
@@ -24274,6 +24413,7 @@
                   <a:srgbClr val="1B3B6F"/>
                 </a:solidFill>
                 <a:latin typeface="Amiri" pitchFamily="2" charset="-78"/>
+                <a:ea typeface="Amiri" pitchFamily="2" charset="-78"/>
                 <a:cs typeface="Amiri" pitchFamily="2" charset="-78"/>
               </a:rPr>
               <a:t>غَيَّرْتِ أَثَاثَ غُرْفَتِكِ. اكْتُبِي رِسَالَةً إِلَى صَدِيقَتِكِ (٨٠–٩٠ كَلِمَةً).</a:t>
@@ -24415,6 +24555,7 @@
                   <a:srgbClr val="1B3B6F"/>
                 </a:solidFill>
                 <a:latin typeface="Amiri" pitchFamily="2" charset="-78"/>
+                <a:ea typeface="Amiri" pitchFamily="2" charset="-78"/>
                 <a:cs typeface="Amiri" pitchFamily="2" charset="-78"/>
               </a:rPr>
               <a:t>مَاذَا اشْتَرَيْتِ أَوْ غَيَّرْتِ؟</a:t>
@@ -24556,6 +24697,7 @@
                   <a:srgbClr val="1B3B6F"/>
                 </a:solidFill>
                 <a:latin typeface="Amiri" pitchFamily="2" charset="-78"/>
+                <a:ea typeface="Amiri" pitchFamily="2" charset="-78"/>
                 <a:cs typeface="Amiri" pitchFamily="2" charset="-78"/>
               </a:rPr>
               <a:t>أَيْنَ وَضَعْتِ الأَشْيَاءَ فِي الغُرْفَةِ؟</a:t>
@@ -24697,6 +24839,7 @@
                   <a:srgbClr val="1B3B6F"/>
                 </a:solidFill>
                 <a:latin typeface="Amiri" pitchFamily="2" charset="-78"/>
+                <a:ea typeface="Amiri" pitchFamily="2" charset="-78"/>
                 <a:cs typeface="Amiri" pitchFamily="2" charset="-78"/>
               </a:rPr>
               <a:t>مَا المُشْكِلَةُ فِي أَحَدِ أَجْهِزَةِ البَيْتِ؟</a:t>
@@ -24838,6 +24981,7 @@
                   <a:srgbClr val="1B3B6F"/>
                 </a:solidFill>
                 <a:latin typeface="Amiri" pitchFamily="2" charset="-78"/>
+                <a:ea typeface="Amiri" pitchFamily="2" charset="-78"/>
                 <a:cs typeface="Amiri" pitchFamily="2" charset="-78"/>
               </a:rPr>
               <a:t>مَاذَا سَيَحْدُثُ بَعْدَ ذٰلِكَ؟ ادْعِي صَدِيقَتَكِ.</a:t>
@@ -25047,6 +25191,7 @@
                   <a:srgbClr val="D4AF37"/>
                 </a:solidFill>
                 <a:latin typeface="Amiri" pitchFamily="2" charset="-78"/>
+                <a:ea typeface="Amiri" pitchFamily="2" charset="-78"/>
                 <a:cs typeface="Amiri" pitchFamily="2" charset="-78"/>
               </a:rPr>
               <a:t>م</a:t>
@@ -25367,6 +25512,7 @@
                   <a:srgbClr val="8A6D1E"/>
                 </a:solidFill>
                 <a:latin typeface="Amiri" pitchFamily="2" charset="-78"/>
+                <a:ea typeface="Amiri" pitchFamily="2" charset="-78"/>
                 <a:cs typeface="Amiri" pitchFamily="2" charset="-78"/>
               </a:rPr>
               <a:t>قَوَالِبُ الكِتَابَةِ</a:t>
@@ -25647,6 +25793,7 @@
                   <a:srgbClr val="1B3B6F"/>
                 </a:solidFill>
                 <a:latin typeface="Amiri" pitchFamily="2" charset="-78"/>
+                <a:ea typeface="Amiri" pitchFamily="2" charset="-78"/>
                 <a:cs typeface="Amiri" pitchFamily="2" charset="-78"/>
               </a:rPr>
               <a:t>مَرْحَبًا يَا ______ ، كَيْفَ حَالُكِ؟</a:t>
@@ -25853,6 +26000,7 @@
                   <a:srgbClr val="1B3B6F"/>
                 </a:solidFill>
                 <a:latin typeface="Amiri" pitchFamily="2" charset="-78"/>
+                <a:ea typeface="Amiri" pitchFamily="2" charset="-78"/>
                 <a:cs typeface="Amiri" pitchFamily="2" charset="-78"/>
               </a:rPr>
               <a:t>غَيَّرْتُ أَثَاثَ غُرْفَتِي. اشْتَرَيْتُ ______ وَ ______ .</a:t>
@@ -26059,6 +26207,7 @@
                   <a:srgbClr val="1B3B6F"/>
                 </a:solidFill>
                 <a:latin typeface="Amiri" pitchFamily="2" charset="-78"/>
+                <a:ea typeface="Amiri" pitchFamily="2" charset="-78"/>
                 <a:cs typeface="Amiri" pitchFamily="2" charset="-78"/>
               </a:rPr>
               <a:t>وَضَعْتُ ______ بِجَانِبِ ______ ، وَفَوْقَ ______ يُوجَدُ ______ .</a:t>
@@ -26265,6 +26414,7 @@
                   <a:srgbClr val="1B3B6F"/>
                 </a:solidFill>
                 <a:latin typeface="Amiri" pitchFamily="2" charset="-78"/>
+                <a:ea typeface="Amiri" pitchFamily="2" charset="-78"/>
                 <a:cs typeface="Amiri" pitchFamily="2" charset="-78"/>
               </a:rPr>
               <a:t>لٰكِنَّ ______ مُعَطَّلَةٌ مُنْذُ ______ .</a:t>
@@ -26471,6 +26621,7 @@
                   <a:srgbClr val="1B3B6F"/>
                 </a:solidFill>
                 <a:latin typeface="Amiri" pitchFamily="2" charset="-78"/>
+                <a:ea typeface="Amiri" pitchFamily="2" charset="-78"/>
                 <a:cs typeface="Amiri" pitchFamily="2" charset="-78"/>
               </a:rPr>
               <a:t>غَدًا سَيَأْتِي الفَنِّيُّ. تَعَالَيْ وَشَاهِدِي غُرْفَتِي!</a:t>
@@ -26677,6 +26828,7 @@
                   <a:srgbClr val="1B3B6F"/>
                 </a:solidFill>
                 <a:latin typeface="Amiri" pitchFamily="2" charset="-78"/>
+                <a:ea typeface="Amiri" pitchFamily="2" charset="-78"/>
                 <a:cs typeface="Amiri" pitchFamily="2" charset="-78"/>
               </a:rPr>
               <a:t>مَعَ السَّلَامَةِ، ______</a:t>
@@ -26916,13 +27068,9 @@
     <a:fontScheme name="Office">
       <a:majorFont>
         <a:latin typeface="Calibri Light" panose="020F0302020204030204"/>
-        <a:ea typeface=""/>
-        <a:cs typeface=""/>
-        <a:font script="Jpan" typeface="游ゴシック Light"/>
-        <a:font script="Hang" typeface="맑은 고딕"/>
-        <a:font script="Hans" typeface="等线 Light"/>
-        <a:font script="Hant" typeface="新細明體"/>
-        <a:font script="Arab" typeface="Times New Roman"/>
+        <a:ea typeface="Amiri" pitchFamily="2" charset="-78"/>
+        <a:cs typeface="Amiri" pitchFamily="2" charset="-78"/>
+        <a:font script="Arab" typeface="Amiri"/>
         <a:font script="Hebr" typeface="Times New Roman"/>
         <a:font script="Thai" typeface="Angsana New"/>
         <a:font script="Ethi" typeface="Nyala"/>
@@ -26968,13 +27116,9 @@
       </a:majorFont>
       <a:minorFont>
         <a:latin typeface="Calibri" panose="020F0502020204030204"/>
-        <a:ea typeface=""/>
-        <a:cs typeface=""/>
-        <a:font script="Jpan" typeface="游ゴシック"/>
-        <a:font script="Hang" typeface="맑은 고딕"/>
-        <a:font script="Hans" typeface="等线"/>
-        <a:font script="Hant" typeface="新細明體"/>
-        <a:font script="Arab" typeface="Arial"/>
+        <a:ea typeface="Amiri" pitchFamily="2" charset="-78"/>
+        <a:cs typeface="Amiri" pitchFamily="2" charset="-78"/>
+        <a:font script="Arab" typeface="Amiri"/>
         <a:font script="Hebr" typeface="Arial"/>
         <a:font script="Thai" typeface="Cordia New"/>
         <a:font script="Ethi" typeface="Nyala"/>

--- a/Topic_B/Exam_Practice/TB-L05_Writing_Workshop_Furniture_Furnishings_and_Appliances.pptx
+++ b/Topic_B/Exam_Practice/TB-L05_Writing_Workshop_Furniture_Furnishings_and_Appliances.pptx
@@ -3848,7 +3848,7 @@
                 <a:solidFill>
                   <a:srgbClr val="FFFFFF"/>
                 </a:solidFill>
-                <a:latin typeface="Calibri" pitchFamily="34" charset="0"/>
+                <a:latin typeface="Amiri" pitchFamily="2" charset="-78"/>
                 <a:ea typeface="Amiri" pitchFamily="2" charset="-78"/>
                 <a:cs typeface="Amiri" pitchFamily="2" charset="-78"/>
               </a:rPr>
@@ -3914,7 +3914,7 @@
                 <a:solidFill>
                   <a:srgbClr val="FFFFFF"/>
                 </a:solidFill>
-                <a:latin typeface="Calibri" pitchFamily="34" charset="0"/>
+                <a:latin typeface="Amiri" pitchFamily="2" charset="-78"/>
                 <a:ea typeface="Amiri" pitchFamily="2" charset="-78"/>
                 <a:cs typeface="Amiri" pitchFamily="2" charset="-78"/>
               </a:rPr>
@@ -3980,7 +3980,7 @@
                 <a:solidFill>
                   <a:srgbClr val="FFFFFF"/>
                 </a:solidFill>
-                <a:latin typeface="Calibri" pitchFamily="34" charset="0"/>
+                <a:latin typeface="Amiri" pitchFamily="2" charset="-78"/>
                 <a:ea typeface="Amiri" pitchFamily="2" charset="-78"/>
                 <a:cs typeface="Amiri" pitchFamily="2" charset="-78"/>
               </a:rPr>
@@ -4046,7 +4046,7 @@
                 <a:solidFill>
                   <a:srgbClr val="FFFFFF"/>
                 </a:solidFill>
-                <a:latin typeface="Calibri" pitchFamily="34" charset="0"/>
+                <a:latin typeface="Amiri" pitchFamily="2" charset="-78"/>
                 <a:ea typeface="Amiri" pitchFamily="2" charset="-78"/>
                 <a:cs typeface="Amiri" pitchFamily="2" charset="-78"/>
               </a:rPr>
@@ -4844,7 +4844,7 @@
                 <a:solidFill>
                   <a:srgbClr val="FFFFFF"/>
                 </a:solidFill>
-                <a:latin typeface="Calibri" pitchFamily="34" charset="0"/>
+                <a:latin typeface="Amiri" pitchFamily="2" charset="-78"/>
                 <a:ea typeface="Amiri" pitchFamily="2" charset="-78"/>
                 <a:cs typeface="Amiri" pitchFamily="2" charset="-78"/>
               </a:rPr>
@@ -4910,7 +4910,7 @@
                 <a:solidFill>
                   <a:srgbClr val="FFFFFF"/>
                 </a:solidFill>
-                <a:latin typeface="Calibri" pitchFamily="34" charset="0"/>
+                <a:latin typeface="Amiri" pitchFamily="2" charset="-78"/>
                 <a:ea typeface="Amiri" pitchFamily="2" charset="-78"/>
                 <a:cs typeface="Amiri" pitchFamily="2" charset="-78"/>
               </a:rPr>
@@ -4976,7 +4976,7 @@
                 <a:solidFill>
                   <a:srgbClr val="FFFFFF"/>
                 </a:solidFill>
-                <a:latin typeface="Calibri" pitchFamily="34" charset="0"/>
+                <a:latin typeface="Amiri" pitchFamily="2" charset="-78"/>
                 <a:ea typeface="Amiri" pitchFamily="2" charset="-78"/>
                 <a:cs typeface="Amiri" pitchFamily="2" charset="-78"/>
               </a:rPr>
@@ -5042,7 +5042,7 @@
                 <a:solidFill>
                   <a:srgbClr val="FFFFFF"/>
                 </a:solidFill>
-                <a:latin typeface="Calibri" pitchFamily="34" charset="0"/>
+                <a:latin typeface="Amiri" pitchFamily="2" charset="-78"/>
                 <a:ea typeface="Amiri" pitchFamily="2" charset="-78"/>
                 <a:cs typeface="Amiri" pitchFamily="2" charset="-78"/>
               </a:rPr>
@@ -8602,7 +8602,7 @@
                 <a:solidFill>
                   <a:srgbClr val="FFFFFF"/>
                 </a:solidFill>
-                <a:latin typeface="Calibri" pitchFamily="34" charset="0"/>
+                <a:latin typeface="Amiri" pitchFamily="2" charset="-78"/>
                 <a:ea typeface="Amiri" pitchFamily="2" charset="-78"/>
                 <a:cs typeface="Amiri" pitchFamily="2" charset="-78"/>
               </a:rPr>
@@ -8668,7 +8668,7 @@
                 <a:solidFill>
                   <a:srgbClr val="FFFFFF"/>
                 </a:solidFill>
-                <a:latin typeface="Calibri" pitchFamily="34" charset="0"/>
+                <a:latin typeface="Amiri" pitchFamily="2" charset="-78"/>
                 <a:ea typeface="Amiri" pitchFamily="2" charset="-78"/>
                 <a:cs typeface="Amiri" pitchFamily="2" charset="-78"/>
               </a:rPr>
@@ -8734,7 +8734,7 @@
                 <a:solidFill>
                   <a:srgbClr val="FFFFFF"/>
                 </a:solidFill>
-                <a:latin typeface="Calibri" pitchFamily="34" charset="0"/>
+                <a:latin typeface="Amiri" pitchFamily="2" charset="-78"/>
                 <a:ea typeface="Amiri" pitchFamily="2" charset="-78"/>
                 <a:cs typeface="Amiri" pitchFamily="2" charset="-78"/>
               </a:rPr>
@@ -8800,7 +8800,7 @@
                 <a:solidFill>
                   <a:srgbClr val="FFFFFF"/>
                 </a:solidFill>
-                <a:latin typeface="Calibri" pitchFamily="34" charset="0"/>
+                <a:latin typeface="Amiri" pitchFamily="2" charset="-78"/>
                 <a:ea typeface="Amiri" pitchFamily="2" charset="-78"/>
                 <a:cs typeface="Amiri" pitchFamily="2" charset="-78"/>
               </a:rPr>
@@ -9587,7 +9587,7 @@
                 <a:solidFill>
                   <a:srgbClr val="FFFFFF"/>
                 </a:solidFill>
-                <a:latin typeface="Calibri" pitchFamily="34" charset="0"/>
+                <a:latin typeface="Amiri" pitchFamily="2" charset="-78"/>
                 <a:ea typeface="Amiri" pitchFamily="2" charset="-78"/>
                 <a:cs typeface="Amiri" pitchFamily="2" charset="-78"/>
               </a:rPr>
@@ -9653,7 +9653,7 @@
                 <a:solidFill>
                   <a:srgbClr val="FFFFFF"/>
                 </a:solidFill>
-                <a:latin typeface="Calibri" pitchFamily="34" charset="0"/>
+                <a:latin typeface="Amiri" pitchFamily="2" charset="-78"/>
                 <a:ea typeface="Amiri" pitchFamily="2" charset="-78"/>
                 <a:cs typeface="Amiri" pitchFamily="2" charset="-78"/>
               </a:rPr>
@@ -9719,7 +9719,7 @@
                 <a:solidFill>
                   <a:srgbClr val="FFFFFF"/>
                 </a:solidFill>
-                <a:latin typeface="Calibri" pitchFamily="34" charset="0"/>
+                <a:latin typeface="Amiri" pitchFamily="2" charset="-78"/>
                 <a:ea typeface="Amiri" pitchFamily="2" charset="-78"/>
                 <a:cs typeface="Amiri" pitchFamily="2" charset="-78"/>
               </a:rPr>
@@ -9785,7 +9785,7 @@
                 <a:solidFill>
                   <a:srgbClr val="FFFFFF"/>
                 </a:solidFill>
-                <a:latin typeface="Calibri" pitchFamily="34" charset="0"/>
+                <a:latin typeface="Amiri" pitchFamily="2" charset="-78"/>
                 <a:ea typeface="Amiri" pitchFamily="2" charset="-78"/>
                 <a:cs typeface="Amiri" pitchFamily="2" charset="-78"/>
               </a:rPr>
@@ -10572,7 +10572,7 @@
                 <a:solidFill>
                   <a:srgbClr val="FFFFFF"/>
                 </a:solidFill>
-                <a:latin typeface="Calibri" pitchFamily="34" charset="0"/>
+                <a:latin typeface="Amiri" pitchFamily="2" charset="-78"/>
                 <a:ea typeface="Amiri" pitchFamily="2" charset="-78"/>
                 <a:cs typeface="Amiri" pitchFamily="2" charset="-78"/>
               </a:rPr>
@@ -10638,7 +10638,7 @@
                 <a:solidFill>
                   <a:srgbClr val="FFFFFF"/>
                 </a:solidFill>
-                <a:latin typeface="Calibri" pitchFamily="34" charset="0"/>
+                <a:latin typeface="Amiri" pitchFamily="2" charset="-78"/>
                 <a:ea typeface="Amiri" pitchFamily="2" charset="-78"/>
                 <a:cs typeface="Amiri" pitchFamily="2" charset="-78"/>
               </a:rPr>
@@ -10704,7 +10704,7 @@
                 <a:solidFill>
                   <a:srgbClr val="FFFFFF"/>
                 </a:solidFill>
-                <a:latin typeface="Calibri" pitchFamily="34" charset="0"/>
+                <a:latin typeface="Amiri" pitchFamily="2" charset="-78"/>
                 <a:ea typeface="Amiri" pitchFamily="2" charset="-78"/>
                 <a:cs typeface="Amiri" pitchFamily="2" charset="-78"/>
               </a:rPr>
@@ -10770,7 +10770,7 @@
                 <a:solidFill>
                   <a:srgbClr val="FFFFFF"/>
                 </a:solidFill>
-                <a:latin typeface="Calibri" pitchFamily="34" charset="0"/>
+                <a:latin typeface="Amiri" pitchFamily="2" charset="-78"/>
                 <a:ea typeface="Amiri" pitchFamily="2" charset="-78"/>
                 <a:cs typeface="Amiri" pitchFamily="2" charset="-78"/>
               </a:rPr>
